--- a/livro_ia_educacao/saida/pptx/Cap12_slides.pptx
+++ b/livro_ia_educacao/saida/pptx/Cap12_slides.pptx
@@ -9349,11 +9349,11 @@
         <p:spPr>
           <a:xfrm>
             <a:off x="548640" y="1417320"/>
-            <a:ext cx="11064240" cy="762000"/>
+            <a:ext cx="11064240" cy="682752"/>
           </a:xfrm>
           <a:prstGeom prst="roundRect">
             <a:avLst>
-              <a:gd name="adj" fmla="val 14400"/>
+              <a:gd name="adj" fmla="val 16071"/>
             </a:avLst>
           </a:prstGeom>
           <a:solidFill>
@@ -9380,7 +9380,7 @@
         <p:spPr>
           <a:xfrm>
             <a:off x="731520" y="1417320"/>
-            <a:ext cx="548640" cy="762000"/>
+            <a:ext cx="548640" cy="682752"/>
           </a:xfrm>
           <a:prstGeom prst="rect">
             <a:avLst/>
@@ -9416,7 +9416,7 @@
         <p:spPr>
           <a:xfrm>
             <a:off x="1463040" y="1417320"/>
-            <a:ext cx="9966960" cy="762000"/>
+            <a:ext cx="9966960" cy="682752"/>
           </a:xfrm>
           <a:prstGeom prst="rect">
             <a:avLst/>
@@ -9451,12 +9451,12 @@
         </p:nvSpPr>
         <p:spPr>
           <a:xfrm>
-            <a:off x="548640" y="2289048"/>
-            <a:ext cx="11064240" cy="762000"/>
+            <a:off x="548640" y="2209800"/>
+            <a:ext cx="11064240" cy="682752"/>
           </a:xfrm>
           <a:prstGeom prst="roundRect">
             <a:avLst>
-              <a:gd name="adj" fmla="val 14400"/>
+              <a:gd name="adj" fmla="val 16071"/>
             </a:avLst>
           </a:prstGeom>
           <a:solidFill>
@@ -9482,8 +9482,8 @@
         </p:nvSpPr>
         <p:spPr>
           <a:xfrm>
-            <a:off x="731520" y="2289048"/>
-            <a:ext cx="548640" cy="762000"/>
+            <a:off x="731520" y="2209800"/>
+            <a:ext cx="548640" cy="682752"/>
           </a:xfrm>
           <a:prstGeom prst="rect">
             <a:avLst/>
@@ -9518,8 +9518,8 @@
         </p:nvSpPr>
         <p:spPr>
           <a:xfrm>
-            <a:off x="1463040" y="2289048"/>
-            <a:ext cx="9966960" cy="762000"/>
+            <a:off x="1463040" y="2209800"/>
+            <a:ext cx="9966960" cy="682752"/>
           </a:xfrm>
           <a:prstGeom prst="rect">
             <a:avLst/>
@@ -9554,12 +9554,12 @@
         </p:nvSpPr>
         <p:spPr>
           <a:xfrm>
-            <a:off x="548640" y="3160776"/>
-            <a:ext cx="11064240" cy="762000"/>
+            <a:off x="548640" y="3002280"/>
+            <a:ext cx="11064240" cy="682752"/>
           </a:xfrm>
           <a:prstGeom prst="roundRect">
             <a:avLst>
-              <a:gd name="adj" fmla="val 14400"/>
+              <a:gd name="adj" fmla="val 16071"/>
             </a:avLst>
           </a:prstGeom>
           <a:solidFill>
@@ -9585,8 +9585,8 @@
         </p:nvSpPr>
         <p:spPr>
           <a:xfrm>
-            <a:off x="731520" y="3160776"/>
-            <a:ext cx="548640" cy="762000"/>
+            <a:off x="731520" y="3002280"/>
+            <a:ext cx="548640" cy="682752"/>
           </a:xfrm>
           <a:prstGeom prst="rect">
             <a:avLst/>
@@ -9621,8 +9621,8 @@
         </p:nvSpPr>
         <p:spPr>
           <a:xfrm>
-            <a:off x="1463040" y="3160776"/>
-            <a:ext cx="9966960" cy="762000"/>
+            <a:off x="1463040" y="3002280"/>
+            <a:ext cx="9966960" cy="682752"/>
           </a:xfrm>
           <a:prstGeom prst="rect">
             <a:avLst/>
@@ -9657,12 +9657,12 @@
         </p:nvSpPr>
         <p:spPr>
           <a:xfrm>
-            <a:off x="548640" y="4032504"/>
-            <a:ext cx="11064240" cy="762000"/>
+            <a:off x="548640" y="3794760"/>
+            <a:ext cx="11064240" cy="682752"/>
           </a:xfrm>
           <a:prstGeom prst="roundRect">
             <a:avLst>
-              <a:gd name="adj" fmla="val 14400"/>
+              <a:gd name="adj" fmla="val 16071"/>
             </a:avLst>
           </a:prstGeom>
           <a:solidFill>
@@ -9688,8 +9688,8 @@
         </p:nvSpPr>
         <p:spPr>
           <a:xfrm>
-            <a:off x="731520" y="4032504"/>
-            <a:ext cx="548640" cy="762000"/>
+            <a:off x="731520" y="3794760"/>
+            <a:ext cx="548640" cy="682752"/>
           </a:xfrm>
           <a:prstGeom prst="rect">
             <a:avLst/>
@@ -9724,8 +9724,8 @@
         </p:nvSpPr>
         <p:spPr>
           <a:xfrm>
-            <a:off x="1463040" y="4032504"/>
-            <a:ext cx="9966960" cy="762000"/>
+            <a:off x="1463040" y="3794760"/>
+            <a:ext cx="9966960" cy="682752"/>
           </a:xfrm>
           <a:prstGeom prst="rect">
             <a:avLst/>
@@ -9760,12 +9760,12 @@
         </p:nvSpPr>
         <p:spPr>
           <a:xfrm>
-            <a:off x="548640" y="4904232"/>
-            <a:ext cx="11064240" cy="762000"/>
+            <a:off x="548640" y="4587240"/>
+            <a:ext cx="11064240" cy="682752"/>
           </a:xfrm>
           <a:prstGeom prst="roundRect">
             <a:avLst>
-              <a:gd name="adj" fmla="val 14400"/>
+              <a:gd name="adj" fmla="val 16071"/>
             </a:avLst>
           </a:prstGeom>
           <a:solidFill>
@@ -9791,8 +9791,8 @@
         </p:nvSpPr>
         <p:spPr>
           <a:xfrm>
-            <a:off x="731520" y="4904232"/>
-            <a:ext cx="548640" cy="762000"/>
+            <a:off x="731520" y="4587240"/>
+            <a:ext cx="548640" cy="682752"/>
           </a:xfrm>
           <a:prstGeom prst="rect">
             <a:avLst/>
@@ -9827,8 +9827,8 @@
         </p:nvSpPr>
         <p:spPr>
           <a:xfrm>
-            <a:off x="1463040" y="4904232"/>
-            <a:ext cx="9966960" cy="762000"/>
+            <a:off x="1463040" y="4587240"/>
+            <a:ext cx="9966960" cy="682752"/>
           </a:xfrm>
           <a:prstGeom prst="rect">
             <a:avLst/>
@@ -9863,12 +9863,12 @@
         </p:nvSpPr>
         <p:spPr>
           <a:xfrm>
-            <a:off x="548640" y="5775960"/>
-            <a:ext cx="11064240" cy="762000"/>
+            <a:off x="548640" y="5379720"/>
+            <a:ext cx="11064240" cy="682752"/>
           </a:xfrm>
           <a:prstGeom prst="roundRect">
             <a:avLst>
-              <a:gd name="adj" fmla="val 14400"/>
+              <a:gd name="adj" fmla="val 16071"/>
             </a:avLst>
           </a:prstGeom>
           <a:solidFill>
@@ -9894,8 +9894,8 @@
         </p:nvSpPr>
         <p:spPr>
           <a:xfrm>
-            <a:off x="731520" y="5775960"/>
-            <a:ext cx="548640" cy="762000"/>
+            <a:off x="731520" y="5379720"/>
+            <a:ext cx="548640" cy="682752"/>
           </a:xfrm>
           <a:prstGeom prst="rect">
             <a:avLst/>
@@ -9930,8 +9930,8 @@
         </p:nvSpPr>
         <p:spPr>
           <a:xfrm>
-            <a:off x="1463040" y="5775960"/>
-            <a:ext cx="9966960" cy="762000"/>
+            <a:off x="1463040" y="5379720"/>
+            <a:ext cx="9966960" cy="682752"/>
           </a:xfrm>
           <a:prstGeom prst="rect">
             <a:avLst/>
